--- a/outputs/ophthalmology-batch-20261011/ok_fitting/slides_editable.pptx
+++ b/outputs/ophthalmology-batch-20261011/ok_fitting/slides_editable.pptx
@@ -524,7 +524,7 @@
           <a:p/>
           <a:p>
             <a:r>
-              <a:t>ok_fitting-02 明确数值禁忌：8岁以下儿童；角膜内皮细胞密度少于2 000个/mm²，为原文禁忌证。</a:t>
+              <a:t>ok_fitting-02 明确数值禁忌：8岁以下儿童（原文表述，8岁整的边界未单独说明）；角膜内皮细胞密度少于2 000个/mm²，为原文禁忌证。</a:t>
             </a:r>
           </a:p>
           <a:p>
@@ -1180,7 +1180,7 @@
           <a:p/>
           <a:p>
             <a:r>
-              <a:t>ok_fitting-02 明确数值禁忌：8岁以下儿童；角膜内皮细胞密度少于2 000个/mm²，为原文禁忌证。</a:t>
+              <a:t>ok_fitting-02 明确数值禁忌：8岁以下儿童（原文表述，8岁整的边界未单独说明）；角膜内皮细胞密度少于2 000个/mm²，为原文禁忌证。</a:t>
             </a:r>
           </a:p>
           <a:p>
@@ -4573,7 +4573,7 @@
         <p:spPr>
           <a:xfrm>
             <a:off x="444500" y="1384300"/>
-            <a:ext cx="11303000" cy="1660313"/>
+            <a:ext cx="11303000" cy="1570566"/>
           </a:xfrm>
           <a:prstGeom prst="rect">
             <a:avLst/>
@@ -4618,7 +4618,7 @@
         <p:spPr>
           <a:xfrm>
             <a:off x="444500" y="1384300"/>
-            <a:ext cx="38100" cy="1660313"/>
+            <a:ext cx="38100" cy="1570566"/>
           </a:xfrm>
           <a:prstGeom prst="rect">
             <a:avLst/>
@@ -4778,7 +4778,7 @@
         </p:nvSpPr>
         <p:spPr>
           <a:xfrm>
-            <a:off x="622300" y="2841413"/>
+            <a:off x="622300" y="2751666"/>
             <a:ext cx="10858500" cy="215900"/>
           </a:xfrm>
           <a:prstGeom prst="rect">
@@ -4825,8 +4825,8 @@
         </p:nvSpPr>
         <p:spPr>
           <a:xfrm>
-            <a:off x="444500" y="3158913"/>
-            <a:ext cx="11303000" cy="1391073"/>
+            <a:off x="444500" y="3069166"/>
+            <a:ext cx="11303000" cy="1570566"/>
           </a:xfrm>
           <a:prstGeom prst="rect">
             <a:avLst/>
@@ -4870,8 +4870,8 @@
         </p:nvSpPr>
         <p:spPr>
           <a:xfrm>
-            <a:off x="444500" y="3158913"/>
-            <a:ext cx="38100" cy="1391073"/>
+            <a:off x="444500" y="3069166"/>
+            <a:ext cx="38100" cy="1570566"/>
           </a:xfrm>
           <a:prstGeom prst="rect">
             <a:avLst/>
@@ -4913,7 +4913,7 @@
         </p:nvSpPr>
         <p:spPr>
           <a:xfrm>
-            <a:off x="622300" y="3260513"/>
+            <a:off x="622300" y="3170766"/>
             <a:ext cx="10858500" cy="355600"/>
           </a:xfrm>
           <a:prstGeom prst="rect">
@@ -4954,14 +4954,14 @@
       </p:sp>
       <p:sp>
         <p:nvSpPr>
-          <p:cNvPr id="14" name="8岁以下儿童；角膜内皮细胞密度少于2 000个/mm²，为原文禁忌证。"/>
+          <p:cNvPr id="14" name="8岁以下儿童（原文表述，8岁整的边界未单独说明）；角膜内皮细胞密度少于2 000个/mm²，为原文禁"/>
           <p:cNvSpPr txBox="1"/>
           <p:nvPr/>
         </p:nvSpPr>
         <p:spPr>
           <a:xfrm>
-            <a:off x="622300" y="3603413"/>
-            <a:ext cx="10858500" cy="332740"/>
+            <a:off x="622300" y="3513666"/>
+            <a:ext cx="10858500" cy="601980"/>
           </a:xfrm>
           <a:prstGeom prst="rect">
             <a:avLst/>
@@ -4994,7 +4994,31 @@
                 <a:ea typeface="Microsoft YaHei"/>
                 <a:cs typeface="Microsoft YaHei"/>
               </a:rPr>
-              <a:t>8岁以下儿童；角膜内皮细胞密度少于2 000个/mm²，为原文禁忌证。</a:t>
+              <a:t>8岁以下儿童（原文表述，8岁整的边界未单独说明）；角膜内皮细胞密度少于2 000个/mm²，为原文</a:t>
+            </a:r>
+          </a:p>
+          <a:p>
+            <a:pPr>
+              <a:lnSpc>
+                <a:spcPts val="2120"/>
+              </a:lnSpc>
+              <a:spcBef>
+                <a:spcPts val="0"/>
+              </a:spcBef>
+              <a:spcAft>
+                <a:spcPts val="0"/>
+              </a:spcAft>
+            </a:pPr>
+            <a:r>
+              <a:rPr sz="1700" b="0" lang="zh-CN">
+                <a:solidFill>
+                  <a:srgbClr val="1E2E3B"/>
+                </a:solidFill>
+                <a:latin typeface="Microsoft YaHei"/>
+                <a:ea typeface="Microsoft YaHei"/>
+                <a:cs typeface="Microsoft YaHei"/>
+              </a:rPr>
+              <a:t>禁忌证。</a:t>
             </a:r>
           </a:p>
         </p:txBody>
@@ -5007,7 +5031,7 @@
         </p:nvSpPr>
         <p:spPr>
           <a:xfrm>
-            <a:off x="622300" y="4346786"/>
+            <a:off x="622300" y="4436533"/>
             <a:ext cx="10858500" cy="215900"/>
           </a:xfrm>
           <a:prstGeom prst="rect">
@@ -5054,8 +5078,8 @@
         </p:nvSpPr>
         <p:spPr>
           <a:xfrm>
-            <a:off x="444500" y="4664286"/>
-            <a:ext cx="11303000" cy="1660313"/>
+            <a:off x="444500" y="4754033"/>
+            <a:ext cx="11303000" cy="1570566"/>
           </a:xfrm>
           <a:prstGeom prst="rect">
             <a:avLst/>
@@ -5099,8 +5123,8 @@
         </p:nvSpPr>
         <p:spPr>
           <a:xfrm>
-            <a:off x="444500" y="4664286"/>
-            <a:ext cx="38100" cy="1660313"/>
+            <a:off x="444500" y="4754033"/>
+            <a:ext cx="38100" cy="1570566"/>
           </a:xfrm>
           <a:prstGeom prst="rect">
             <a:avLst/>
@@ -5142,7 +5166,7 @@
         </p:nvSpPr>
         <p:spPr>
           <a:xfrm>
-            <a:off x="622300" y="4765886"/>
+            <a:off x="622300" y="4855633"/>
             <a:ext cx="10858500" cy="355600"/>
           </a:xfrm>
           <a:prstGeom prst="rect">
@@ -5189,7 +5213,7 @@
         </p:nvSpPr>
         <p:spPr>
           <a:xfrm>
-            <a:off x="622300" y="5108786"/>
+            <a:off x="622300" y="5198533"/>
             <a:ext cx="10858500" cy="601980"/>
           </a:xfrm>
           <a:prstGeom prst="rect">
@@ -10404,7 +10428,7 @@
       </p:sp>
       <p:sp>
         <p:nvSpPr>
-          <p:cNvPr id="7" name="曲率39.00～48.00 D；&lt;8岁/内皮&lt;2 000等 → 非常规验配，特殊需求按原文专门评估。"/>
+          <p:cNvPr id="7" name="曲率39.00～48.00 D；8岁以下/内皮密度&lt;2 000个/mm²等 → 非常规验配，特殊需求"/>
           <p:cNvSpPr txBox="1"/>
           <p:nvPr/>
         </p:nvSpPr>
@@ -10444,7 +10468,7 @@
                 <a:ea typeface="Microsoft YaHei"/>
                 <a:cs typeface="Microsoft YaHei"/>
               </a:rPr>
-              <a:t>曲率39.00～48.00 D；&lt;8岁/内皮&lt;2 000等 → 非常规验配，特殊</a:t>
+              <a:t>曲率39.00～48.00 D；8岁以下/内皮密度&lt;2 000个/mm²等 → 非</a:t>
             </a:r>
           </a:p>
           <a:p>
@@ -10468,7 +10492,7 @@
                 <a:ea typeface="Microsoft YaHei"/>
                 <a:cs typeface="Microsoft YaHei"/>
               </a:rPr>
-              <a:t>需求按原文专门评估。</a:t>
+              <a:t>常规验配，特殊需求按原文专门评估。</a:t>
             </a:r>
           </a:p>
         </p:txBody>
